--- a/01-delivered-case-studies/ecommerce-boss-event-automation/Deck/Executive_Deck.pptx
+++ b/01-delivered-case-studies/ecommerce-boss-event-automation/Deck/Executive_Deck.pptx
@@ -1391,7 +1391,7 @@
     <p:bg>
       <p:bgPr>
         <a:solidFill>
-          <a:srgbClr val="15253D"/>
+          <a:srgbClr val="111111"/>
         </a:solidFill>
       </p:bgPr>
     </p:bg>
@@ -1418,7 +1418,7 @@
         <p:spPr>
           <a:xfrm>
             <a:off x="731520" y="1188720"/>
-            <a:ext cx="7315200" cy="365760"/>
+            <a:ext cx="6217920" cy="365760"/>
           </a:xfrm>
           <a:prstGeom prst="rect">
             <a:avLst/>
@@ -1436,7 +1436,7 @@
             <a:r>
               <a:rPr lang="en-US" sz="1300" b="1" spc="200" kern="0" dirty="0">
                 <a:solidFill>
-                  <a:srgbClr val="5EEAD4"/>
+                  <a:srgbClr val="E5E5E5"/>
                 </a:solidFill>
                 <a:latin typeface="Arial" pitchFamily="34" charset="0"/>
                 <a:ea typeface="Arial" pitchFamily="34" charset="-122"/>
@@ -1457,7 +1457,7 @@
         <p:spPr>
           <a:xfrm>
             <a:off x="731520" y="1645920"/>
-            <a:ext cx="10515600" cy="1463040"/>
+            <a:ext cx="6217920" cy="1463040"/>
           </a:xfrm>
           <a:prstGeom prst="rect">
             <a:avLst/>
@@ -1473,7 +1473,7 @@
               <a:buNone/>
             </a:pPr>
             <a:r>
-              <a:rPr lang="en-US" sz="4000" b="1" dirty="0">
+              <a:rPr lang="en-US" sz="3400" b="1" dirty="0">
                 <a:solidFill>
                   <a:srgbClr val="FFFFFF"/>
                 </a:solidFill>
@@ -1496,7 +1496,7 @@
         <p:spPr>
           <a:xfrm>
             <a:off x="731520" y="3291840"/>
-            <a:ext cx="10058400" cy="822960"/>
+            <a:ext cx="6217920" cy="822960"/>
           </a:xfrm>
           <a:prstGeom prst="rect">
             <a:avLst/>
@@ -1535,7 +1535,7 @@
         <p:spPr>
           <a:xfrm>
             <a:off x="731520" y="4663440"/>
-            <a:ext cx="2743200" cy="0"/>
+            <a:ext cx="6217920" cy="0"/>
           </a:xfrm>
           <a:prstGeom prst="line">
             <a:avLst/>
@@ -1543,11 +1543,15 @@
           <a:noFill/>
           <a:ln w="25400">
             <a:solidFill>
-              <a:srgbClr val="5EEAD4"/>
+              <a:srgbClr val="E5E5E5"/>
             </a:solidFill>
             <a:prstDash val="solid"/>
           </a:ln>
         </p:spPr>
+        <p:txBody>
+          <a:bodyPr/>
+          <a:p/>
+        </p:txBody>
       </p:sp>
       <p:sp>
         <p:nvSpPr>
@@ -1558,7 +1562,7 @@
         <p:spPr>
           <a:xfrm>
             <a:off x="731520" y="4846320"/>
-            <a:ext cx="10058400" cy="1097280"/>
+            <a:ext cx="6217920" cy="1097280"/>
           </a:xfrm>
           <a:prstGeom prst="rect">
             <a:avLst/>
@@ -1682,6 +1686,118 @@
           </a:p>
         </p:txBody>
       </p:sp>
+      <p:sp>
+        <p:nvSpPr>
+          <p:cNvPr id="7" name="Rectangle 6"/>
+          <p:cNvSpPr/>
+          <p:nvPr/>
+        </p:nvSpPr>
+        <p:spPr>
+          <a:xfrm>
+            <a:off x="7315200" y="0"/>
+            <a:ext cx="4876800" cy="6858000"/>
+          </a:xfrm>
+          <a:prstGeom prst="rect">
+            <a:avLst/>
+          </a:prstGeom>
+          <a:solidFill>
+            <a:srgbClr val="FFFFFF"/>
+          </a:solidFill>
+          <a:ln>
+            <a:noFill/>
+          </a:ln>
+          <a:effectLst/>
+        </p:spPr>
+        <p:style>
+          <a:lnRef idx="1">
+            <a:schemeClr val="accent1"/>
+          </a:lnRef>
+          <a:fillRef idx="3">
+            <a:schemeClr val="accent1"/>
+          </a:fillRef>
+          <a:effectRef idx="2">
+            <a:schemeClr val="accent1"/>
+          </a:effectRef>
+          <a:fontRef idx="minor">
+            <a:schemeClr val="lt1"/>
+          </a:fontRef>
+        </p:style>
+        <p:txBody>
+          <a:bodyPr rtlCol="0" anchor="ctr"/>
+          <a:lstStyle/>
+          <a:p>
+            <a:pPr algn="ctr"/>
+          </a:p>
+        </p:txBody>
+      </p:sp>
+      <p:pic>
+        <p:nvPicPr>
+          <p:cNvPr id="8" name="Picture 7" descr="teb_logo.png"/>
+          <p:cNvPicPr>
+            <a:picLocks noChangeAspect="1"/>
+          </p:cNvPicPr>
+          <p:nvPr/>
+        </p:nvPicPr>
+        <p:blipFill>
+          <a:blip r:embed="rId3"/>
+          <a:stretch>
+            <a:fillRect/>
+          </a:stretch>
+        </p:blipFill>
+        <p:spPr>
+          <a:xfrm>
+            <a:off x="8046720" y="2865769"/>
+            <a:ext cx="3413760" cy="1126461"/>
+          </a:xfrm>
+          <a:prstGeom prst="rect">
+            <a:avLst/>
+          </a:prstGeom>
+        </p:spPr>
+      </p:pic>
+      <p:sp>
+        <p:nvSpPr>
+          <p:cNvPr id="9" name="Rectangle 8"/>
+          <p:cNvSpPr/>
+          <p:nvPr/>
+        </p:nvSpPr>
+        <p:spPr>
+          <a:xfrm>
+            <a:off x="7315200" y="0"/>
+            <a:ext cx="109728" cy="6858000"/>
+          </a:xfrm>
+          <a:prstGeom prst="rect">
+            <a:avLst/>
+          </a:prstGeom>
+          <a:solidFill>
+            <a:srgbClr val="E5E5E5"/>
+          </a:solidFill>
+          <a:ln>
+            <a:noFill/>
+          </a:ln>
+          <a:effectLst/>
+        </p:spPr>
+        <p:style>
+          <a:lnRef idx="1">
+            <a:schemeClr val="accent1"/>
+          </a:lnRef>
+          <a:fillRef idx="3">
+            <a:schemeClr val="accent1"/>
+          </a:fillRef>
+          <a:effectRef idx="2">
+            <a:schemeClr val="accent1"/>
+          </a:effectRef>
+          <a:fontRef idx="minor">
+            <a:schemeClr val="lt1"/>
+          </a:fontRef>
+        </p:style>
+        <p:txBody>
+          <a:bodyPr rtlCol="0" anchor="ctr"/>
+          <a:lstStyle/>
+          <a:p>
+            <a:pPr algn="ctr"/>
+          </a:p>
+        </p:txBody>
+      </p:sp>
     </p:spTree>
   </p:cSld>
   <p:clrMapOvr>
@@ -1741,7 +1857,7 @@
             <a:r>
               <a:rPr lang="en-US" sz="2600" b="1" dirty="0">
                 <a:solidFill>
-                  <a:srgbClr val="15253D"/>
+                  <a:srgbClr val="111111"/>
                 </a:solidFill>
                 <a:latin typeface="Arial" pitchFamily="34" charset="0"/>
                 <a:ea typeface="Arial" pitchFamily="34" charset="-122"/>
@@ -1768,11 +1884,11 @@
             <a:avLst/>
           </a:prstGeom>
           <a:solidFill>
-            <a:srgbClr val="F4F7FB"/>
+            <a:srgbClr val="F5F5F5"/>
           </a:solidFill>
           <a:ln w="12700">
             <a:solidFill>
-              <a:srgbClr val="F4F7FB"/>
+              <a:srgbClr val="F5F5F5"/>
             </a:solidFill>
             <a:prstDash val="solid"/>
           </a:ln>
@@ -1805,7 +1921,7 @@
             <a:r>
               <a:rPr lang="en-US" sz="1400" b="1" dirty="0">
                 <a:solidFill>
-                  <a:srgbClr val="0F766E"/>
+                  <a:srgbClr val="111111"/>
                 </a:solidFill>
                 <a:latin typeface="Arial" pitchFamily="34" charset="0"/>
                 <a:ea typeface="Arial" pitchFamily="34" charset="-122"/>
@@ -1883,7 +1999,7 @@
             <a:r>
               <a:rPr lang="en-US" sz="1400" b="1" dirty="0">
                 <a:solidFill>
-                  <a:srgbClr val="0F766E"/>
+                  <a:srgbClr val="111111"/>
                 </a:solidFill>
                 <a:latin typeface="Arial" pitchFamily="34" charset="0"/>
                 <a:ea typeface="Arial" pitchFamily="34" charset="-122"/>
@@ -1910,11 +2026,11 @@
             <a:avLst/>
           </a:prstGeom>
           <a:solidFill>
-            <a:srgbClr val="EA580C"/>
+            <a:srgbClr val="111111"/>
           </a:solidFill>
           <a:ln w="12700">
             <a:solidFill>
-              <a:srgbClr val="EA580C"/>
+              <a:srgbClr val="111111"/>
             </a:solidFill>
             <a:prstDash val="solid"/>
           </a:ln>
@@ -2013,11 +2129,11 @@
             <a:avLst/>
           </a:prstGeom>
           <a:solidFill>
-            <a:srgbClr val="EA580C"/>
+            <a:srgbClr val="111111"/>
           </a:solidFill>
           <a:ln w="12700">
             <a:solidFill>
-              <a:srgbClr val="EA580C"/>
+              <a:srgbClr val="111111"/>
             </a:solidFill>
             <a:prstDash val="solid"/>
           </a:ln>
@@ -2116,11 +2232,11 @@
             <a:avLst/>
           </a:prstGeom>
           <a:solidFill>
-            <a:srgbClr val="EA580C"/>
+            <a:srgbClr val="111111"/>
           </a:solidFill>
           <a:ln w="12700">
             <a:solidFill>
-              <a:srgbClr val="EA580C"/>
+              <a:srgbClr val="111111"/>
             </a:solidFill>
             <a:prstDash val="solid"/>
           </a:ln>
@@ -2282,6 +2398,118 @@
           </a:p>
         </p:txBody>
       </p:sp>
+      <p:sp>
+        <p:nvSpPr>
+          <p:cNvPr id="18" name="Rectangle 17"/>
+          <p:cNvSpPr/>
+          <p:nvPr/>
+        </p:nvSpPr>
+        <p:spPr>
+          <a:xfrm>
+            <a:off x="0" y="0"/>
+            <a:ext cx="12192000" cy="82296"/>
+          </a:xfrm>
+          <a:prstGeom prst="rect">
+            <a:avLst/>
+          </a:prstGeom>
+          <a:solidFill>
+            <a:srgbClr val="111111"/>
+          </a:solidFill>
+          <a:ln>
+            <a:noFill/>
+          </a:ln>
+          <a:effectLst/>
+        </p:spPr>
+        <p:style>
+          <a:lnRef idx="1">
+            <a:schemeClr val="accent1"/>
+          </a:lnRef>
+          <a:fillRef idx="3">
+            <a:schemeClr val="accent1"/>
+          </a:fillRef>
+          <a:effectRef idx="2">
+            <a:schemeClr val="accent1"/>
+          </a:effectRef>
+          <a:fontRef idx="minor">
+            <a:schemeClr val="lt1"/>
+          </a:fontRef>
+        </p:style>
+        <p:txBody>
+          <a:bodyPr rtlCol="0" anchor="ctr"/>
+          <a:lstStyle/>
+          <a:p>
+            <a:pPr algn="ctr"/>
+          </a:p>
+        </p:txBody>
+      </p:sp>
+      <p:sp>
+        <p:nvSpPr>
+          <p:cNvPr id="19" name="Rectangle 18"/>
+          <p:cNvSpPr/>
+          <p:nvPr/>
+        </p:nvSpPr>
+        <p:spPr>
+          <a:xfrm>
+            <a:off x="0" y="82296"/>
+            <a:ext cx="1463040" cy="45720"/>
+          </a:xfrm>
+          <a:prstGeom prst="rect">
+            <a:avLst/>
+          </a:prstGeom>
+          <a:solidFill>
+            <a:srgbClr val="111111"/>
+          </a:solidFill>
+          <a:ln>
+            <a:noFill/>
+          </a:ln>
+          <a:effectLst/>
+        </p:spPr>
+        <p:style>
+          <a:lnRef idx="1">
+            <a:schemeClr val="accent1"/>
+          </a:lnRef>
+          <a:fillRef idx="3">
+            <a:schemeClr val="accent1"/>
+          </a:fillRef>
+          <a:effectRef idx="2">
+            <a:schemeClr val="accent1"/>
+          </a:effectRef>
+          <a:fontRef idx="minor">
+            <a:schemeClr val="lt1"/>
+          </a:fontRef>
+        </p:style>
+        <p:txBody>
+          <a:bodyPr rtlCol="0" anchor="ctr"/>
+          <a:lstStyle/>
+          <a:p>
+            <a:pPr algn="ctr"/>
+          </a:p>
+        </p:txBody>
+      </p:sp>
+      <p:pic>
+        <p:nvPicPr>
+          <p:cNvPr id="20" name="Picture 19" descr="teb_logo.png"/>
+          <p:cNvPicPr>
+            <a:picLocks noChangeAspect="1"/>
+          </p:cNvPicPr>
+          <p:nvPr/>
+        </p:nvPicPr>
+        <p:blipFill>
+          <a:blip r:embed="rId3"/>
+          <a:stretch>
+            <a:fillRect/>
+          </a:stretch>
+        </p:blipFill>
+        <p:spPr>
+          <a:xfrm>
+            <a:off x="10363200" y="6362864"/>
+            <a:ext cx="1005840" cy="331903"/>
+          </a:xfrm>
+          <a:prstGeom prst="rect">
+            <a:avLst/>
+          </a:prstGeom>
+        </p:spPr>
+      </p:pic>
     </p:spTree>
   </p:cSld>
   <p:clrMapOvr>
@@ -2341,7 +2569,7 @@
             <a:r>
               <a:rPr lang="en-US" sz="2600" b="1" dirty="0">
                 <a:solidFill>
-                  <a:srgbClr val="15253D"/>
+                  <a:srgbClr val="111111"/>
                 </a:solidFill>
                 <a:latin typeface="Arial" pitchFamily="34" charset="0"/>
                 <a:ea typeface="Arial" pitchFamily="34" charset="-122"/>
@@ -2494,6 +2722,118 @@
           </a:p>
         </p:txBody>
       </p:sp>
+      <p:sp>
+        <p:nvSpPr>
+          <p:cNvPr id="7" name="Rectangle 6"/>
+          <p:cNvSpPr/>
+          <p:nvPr/>
+        </p:nvSpPr>
+        <p:spPr>
+          <a:xfrm>
+            <a:off x="0" y="0"/>
+            <a:ext cx="12192000" cy="82296"/>
+          </a:xfrm>
+          <a:prstGeom prst="rect">
+            <a:avLst/>
+          </a:prstGeom>
+          <a:solidFill>
+            <a:srgbClr val="111111"/>
+          </a:solidFill>
+          <a:ln>
+            <a:noFill/>
+          </a:ln>
+          <a:effectLst/>
+        </p:spPr>
+        <p:style>
+          <a:lnRef idx="1">
+            <a:schemeClr val="accent1"/>
+          </a:lnRef>
+          <a:fillRef idx="3">
+            <a:schemeClr val="accent1"/>
+          </a:fillRef>
+          <a:effectRef idx="2">
+            <a:schemeClr val="accent1"/>
+          </a:effectRef>
+          <a:fontRef idx="minor">
+            <a:schemeClr val="lt1"/>
+          </a:fontRef>
+        </p:style>
+        <p:txBody>
+          <a:bodyPr rtlCol="0" anchor="ctr"/>
+          <a:lstStyle/>
+          <a:p>
+            <a:pPr algn="ctr"/>
+          </a:p>
+        </p:txBody>
+      </p:sp>
+      <p:sp>
+        <p:nvSpPr>
+          <p:cNvPr id="8" name="Rectangle 7"/>
+          <p:cNvSpPr/>
+          <p:nvPr/>
+        </p:nvSpPr>
+        <p:spPr>
+          <a:xfrm>
+            <a:off x="0" y="82296"/>
+            <a:ext cx="1463040" cy="45720"/>
+          </a:xfrm>
+          <a:prstGeom prst="rect">
+            <a:avLst/>
+          </a:prstGeom>
+          <a:solidFill>
+            <a:srgbClr val="111111"/>
+          </a:solidFill>
+          <a:ln>
+            <a:noFill/>
+          </a:ln>
+          <a:effectLst/>
+        </p:spPr>
+        <p:style>
+          <a:lnRef idx="1">
+            <a:schemeClr val="accent1"/>
+          </a:lnRef>
+          <a:fillRef idx="3">
+            <a:schemeClr val="accent1"/>
+          </a:fillRef>
+          <a:effectRef idx="2">
+            <a:schemeClr val="accent1"/>
+          </a:effectRef>
+          <a:fontRef idx="minor">
+            <a:schemeClr val="lt1"/>
+          </a:fontRef>
+        </p:style>
+        <p:txBody>
+          <a:bodyPr rtlCol="0" anchor="ctr"/>
+          <a:lstStyle/>
+          <a:p>
+            <a:pPr algn="ctr"/>
+          </a:p>
+        </p:txBody>
+      </p:sp>
+      <p:pic>
+        <p:nvPicPr>
+          <p:cNvPr id="9" name="Picture 8" descr="teb_logo.png"/>
+          <p:cNvPicPr>
+            <a:picLocks noChangeAspect="1"/>
+          </p:cNvPicPr>
+          <p:nvPr/>
+        </p:nvPicPr>
+        <p:blipFill>
+          <a:blip r:embed="rId4"/>
+          <a:stretch>
+            <a:fillRect/>
+          </a:stretch>
+        </p:blipFill>
+        <p:spPr>
+          <a:xfrm>
+            <a:off x="10363200" y="6362864"/>
+            <a:ext cx="1005840" cy="331903"/>
+          </a:xfrm>
+          <a:prstGeom prst="rect">
+            <a:avLst/>
+          </a:prstGeom>
+        </p:spPr>
+      </p:pic>
     </p:spTree>
   </p:cSld>
   <p:clrMapOvr>
@@ -2553,7 +2893,7 @@
             <a:r>
               <a:rPr lang="en-US" sz="2600" b="1" dirty="0">
                 <a:solidFill>
-                  <a:srgbClr val="15253D"/>
+                  <a:srgbClr val="111111"/>
                 </a:solidFill>
                 <a:latin typeface="Arial" pitchFamily="34" charset="0"/>
                 <a:ea typeface="Arial" pitchFamily="34" charset="-122"/>
@@ -2706,6 +3046,118 @@
           </a:p>
         </p:txBody>
       </p:sp>
+      <p:sp>
+        <p:nvSpPr>
+          <p:cNvPr id="7" name="Rectangle 6"/>
+          <p:cNvSpPr/>
+          <p:nvPr/>
+        </p:nvSpPr>
+        <p:spPr>
+          <a:xfrm>
+            <a:off x="0" y="0"/>
+            <a:ext cx="12192000" cy="82296"/>
+          </a:xfrm>
+          <a:prstGeom prst="rect">
+            <a:avLst/>
+          </a:prstGeom>
+          <a:solidFill>
+            <a:srgbClr val="111111"/>
+          </a:solidFill>
+          <a:ln>
+            <a:noFill/>
+          </a:ln>
+          <a:effectLst/>
+        </p:spPr>
+        <p:style>
+          <a:lnRef idx="1">
+            <a:schemeClr val="accent1"/>
+          </a:lnRef>
+          <a:fillRef idx="3">
+            <a:schemeClr val="accent1"/>
+          </a:fillRef>
+          <a:effectRef idx="2">
+            <a:schemeClr val="accent1"/>
+          </a:effectRef>
+          <a:fontRef idx="minor">
+            <a:schemeClr val="lt1"/>
+          </a:fontRef>
+        </p:style>
+        <p:txBody>
+          <a:bodyPr rtlCol="0" anchor="ctr"/>
+          <a:lstStyle/>
+          <a:p>
+            <a:pPr algn="ctr"/>
+          </a:p>
+        </p:txBody>
+      </p:sp>
+      <p:sp>
+        <p:nvSpPr>
+          <p:cNvPr id="8" name="Rectangle 7"/>
+          <p:cNvSpPr/>
+          <p:nvPr/>
+        </p:nvSpPr>
+        <p:spPr>
+          <a:xfrm>
+            <a:off x="0" y="82296"/>
+            <a:ext cx="1463040" cy="45720"/>
+          </a:xfrm>
+          <a:prstGeom prst="rect">
+            <a:avLst/>
+          </a:prstGeom>
+          <a:solidFill>
+            <a:srgbClr val="111111"/>
+          </a:solidFill>
+          <a:ln>
+            <a:noFill/>
+          </a:ln>
+          <a:effectLst/>
+        </p:spPr>
+        <p:style>
+          <a:lnRef idx="1">
+            <a:schemeClr val="accent1"/>
+          </a:lnRef>
+          <a:fillRef idx="3">
+            <a:schemeClr val="accent1"/>
+          </a:fillRef>
+          <a:effectRef idx="2">
+            <a:schemeClr val="accent1"/>
+          </a:effectRef>
+          <a:fontRef idx="minor">
+            <a:schemeClr val="lt1"/>
+          </a:fontRef>
+        </p:style>
+        <p:txBody>
+          <a:bodyPr rtlCol="0" anchor="ctr"/>
+          <a:lstStyle/>
+          <a:p>
+            <a:pPr algn="ctr"/>
+          </a:p>
+        </p:txBody>
+      </p:sp>
+      <p:pic>
+        <p:nvPicPr>
+          <p:cNvPr id="9" name="Picture 8" descr="teb_logo.png"/>
+          <p:cNvPicPr>
+            <a:picLocks noChangeAspect="1"/>
+          </p:cNvPicPr>
+          <p:nvPr/>
+        </p:nvPicPr>
+        <p:blipFill>
+          <a:blip r:embed="rId4"/>
+          <a:stretch>
+            <a:fillRect/>
+          </a:stretch>
+        </p:blipFill>
+        <p:spPr>
+          <a:xfrm>
+            <a:off x="10363200" y="6362864"/>
+            <a:ext cx="1005840" cy="331903"/>
+          </a:xfrm>
+          <a:prstGeom prst="rect">
+            <a:avLst/>
+          </a:prstGeom>
+        </p:spPr>
+      </p:pic>
     </p:spTree>
   </p:cSld>
   <p:clrMapOvr>
@@ -2765,7 +3217,7 @@
             <a:r>
               <a:rPr lang="en-US" sz="2600" b="1" dirty="0">
                 <a:solidFill>
-                  <a:srgbClr val="15253D"/>
+                  <a:srgbClr val="111111"/>
                 </a:solidFill>
                 <a:latin typeface="Arial" pitchFamily="34" charset="0"/>
                 <a:ea typeface="Arial" pitchFamily="34" charset="-122"/>
@@ -2834,7 +3286,7 @@
                   <a:tcPr marL="109728" marR="109728" marT="109728" marB="109728" anchor="ctr">
                     <a:lnL w="9525" cap="flat" cmpd="sng" algn="ctr">
                       <a:solidFill>
-                        <a:srgbClr val="D5DDE8"/>
+                        <a:srgbClr val="DDDDDD"/>
                       </a:solidFill>
                       <a:prstDash val="solid"/>
                       <a:round/>
@@ -2843,7 +3295,7 @@
                     </a:lnL>
                     <a:lnR w="9525" cap="flat" cmpd="sng" algn="ctr">
                       <a:solidFill>
-                        <a:srgbClr val="D5DDE8"/>
+                        <a:srgbClr val="DDDDDD"/>
                       </a:solidFill>
                       <a:prstDash val="solid"/>
                       <a:round/>
@@ -2852,7 +3304,7 @@
                     </a:lnR>
                     <a:lnT w="9525" cap="flat" cmpd="sng" algn="ctr">
                       <a:solidFill>
-                        <a:srgbClr val="D5DDE8"/>
+                        <a:srgbClr val="DDDDDD"/>
                       </a:solidFill>
                       <a:prstDash val="solid"/>
                       <a:round/>
@@ -2861,7 +3313,7 @@
                     </a:lnT>
                     <a:lnB w="9525" cap="flat" cmpd="sng" algn="ctr">
                       <a:solidFill>
-                        <a:srgbClr val="D5DDE8"/>
+                        <a:srgbClr val="DDDDDD"/>
                       </a:solidFill>
                       <a:prstDash val="solid"/>
                       <a:round/>
@@ -2869,7 +3321,7 @@
                       <a:tailEnd type="none" w="med" len="med"/>
                     </a:lnB>
                     <a:solidFill>
-                      <a:srgbClr val="15253D"/>
+                      <a:srgbClr val="111111"/>
                     </a:solidFill>
                   </a:tcPr>
                 </a:tc>
@@ -2902,7 +3354,7 @@
                   <a:tcPr marL="109728" marR="109728" marT="109728" marB="109728" anchor="ctr">
                     <a:lnL w="9525" cap="flat" cmpd="sng" algn="ctr">
                       <a:solidFill>
-                        <a:srgbClr val="D5DDE8"/>
+                        <a:srgbClr val="DDDDDD"/>
                       </a:solidFill>
                       <a:prstDash val="solid"/>
                       <a:round/>
@@ -2911,7 +3363,7 @@
                     </a:lnL>
                     <a:lnR w="9525" cap="flat" cmpd="sng" algn="ctr">
                       <a:solidFill>
-                        <a:srgbClr val="D5DDE8"/>
+                        <a:srgbClr val="DDDDDD"/>
                       </a:solidFill>
                       <a:prstDash val="solid"/>
                       <a:round/>
@@ -2920,7 +3372,7 @@
                     </a:lnR>
                     <a:lnT w="9525" cap="flat" cmpd="sng" algn="ctr">
                       <a:solidFill>
-                        <a:srgbClr val="D5DDE8"/>
+                        <a:srgbClr val="DDDDDD"/>
                       </a:solidFill>
                       <a:prstDash val="solid"/>
                       <a:round/>
@@ -2929,7 +3381,7 @@
                     </a:lnT>
                     <a:lnB w="9525" cap="flat" cmpd="sng" algn="ctr">
                       <a:solidFill>
-                        <a:srgbClr val="D5DDE8"/>
+                        <a:srgbClr val="DDDDDD"/>
                       </a:solidFill>
                       <a:prstDash val="solid"/>
                       <a:round/>
@@ -2937,7 +3389,7 @@
                       <a:tailEnd type="none" w="med" len="med"/>
                     </a:lnB>
                     <a:solidFill>
-                      <a:srgbClr val="15253D"/>
+                      <a:srgbClr val="111111"/>
                     </a:solidFill>
                   </a:tcPr>
                 </a:tc>
@@ -2970,7 +3422,7 @@
                   <a:tcPr marL="109728" marR="109728" marT="109728" marB="109728" anchor="ctr">
                     <a:lnL w="9525" cap="flat" cmpd="sng" algn="ctr">
                       <a:solidFill>
-                        <a:srgbClr val="D5DDE8"/>
+                        <a:srgbClr val="DDDDDD"/>
                       </a:solidFill>
                       <a:prstDash val="solid"/>
                       <a:round/>
@@ -2979,7 +3431,7 @@
                     </a:lnL>
                     <a:lnR w="9525" cap="flat" cmpd="sng" algn="ctr">
                       <a:solidFill>
-                        <a:srgbClr val="D5DDE8"/>
+                        <a:srgbClr val="DDDDDD"/>
                       </a:solidFill>
                       <a:prstDash val="solid"/>
                       <a:round/>
@@ -2988,7 +3440,7 @@
                     </a:lnR>
                     <a:lnT w="9525" cap="flat" cmpd="sng" algn="ctr">
                       <a:solidFill>
-                        <a:srgbClr val="D5DDE8"/>
+                        <a:srgbClr val="DDDDDD"/>
                       </a:solidFill>
                       <a:prstDash val="solid"/>
                       <a:round/>
@@ -2997,7 +3449,7 @@
                     </a:lnT>
                     <a:lnB w="9525" cap="flat" cmpd="sng" algn="ctr">
                       <a:solidFill>
-                        <a:srgbClr val="D5DDE8"/>
+                        <a:srgbClr val="DDDDDD"/>
                       </a:solidFill>
                       <a:prstDash val="solid"/>
                       <a:round/>
@@ -3005,7 +3457,7 @@
                       <a:tailEnd type="none" w="med" len="med"/>
                     </a:lnB>
                     <a:solidFill>
-                      <a:srgbClr val="15253D"/>
+                      <a:srgbClr val="111111"/>
                     </a:solidFill>
                   </a:tcPr>
                 </a:tc>
@@ -3022,7 +3474,7 @@
                       <a:r>
                         <a:rPr lang="en-US" sz="1500" b="1" dirty="0">
                           <a:solidFill>
-                            <a:srgbClr val="0F766E"/>
+                            <a:srgbClr val="111111"/>
                           </a:solidFill>
                           <a:latin typeface="Arial" pitchFamily="34" charset="0"/>
                           <a:ea typeface="Arial" pitchFamily="34" charset="-122"/>
@@ -3040,7 +3492,7 @@
                   <a:tcPr marL="109728" marR="109728" marT="109728" marB="109728" anchor="ctr">
                     <a:lnL w="9525" cap="flat" cmpd="sng" algn="ctr">
                       <a:solidFill>
-                        <a:srgbClr val="D5DDE8"/>
+                        <a:srgbClr val="DDDDDD"/>
                       </a:solidFill>
                       <a:prstDash val="solid"/>
                       <a:round/>
@@ -3049,7 +3501,7 @@
                     </a:lnL>
                     <a:lnR w="9525" cap="flat" cmpd="sng" algn="ctr">
                       <a:solidFill>
-                        <a:srgbClr val="D5DDE8"/>
+                        <a:srgbClr val="DDDDDD"/>
                       </a:solidFill>
                       <a:prstDash val="solid"/>
                       <a:round/>
@@ -3058,7 +3510,7 @@
                     </a:lnR>
                     <a:lnT w="9525" cap="flat" cmpd="sng" algn="ctr">
                       <a:solidFill>
-                        <a:srgbClr val="D5DDE8"/>
+                        <a:srgbClr val="DDDDDD"/>
                       </a:solidFill>
                       <a:prstDash val="solid"/>
                       <a:round/>
@@ -3067,7 +3519,7 @@
                     </a:lnT>
                     <a:lnB w="9525" cap="flat" cmpd="sng" algn="ctr">
                       <a:solidFill>
-                        <a:srgbClr val="D5DDE8"/>
+                        <a:srgbClr val="DDDDDD"/>
                       </a:solidFill>
                       <a:prstDash val="solid"/>
                       <a:round/>
@@ -3075,7 +3527,7 @@
                       <a:tailEnd type="none" w="med" len="med"/>
                     </a:lnB>
                     <a:solidFill>
-                      <a:srgbClr val="F4F7FB"/>
+                      <a:srgbClr val="F5F5F5"/>
                     </a:solidFill>
                   </a:tcPr>
                 </a:tc>
@@ -3108,7 +3560,7 @@
                   <a:tcPr marL="109728" marR="109728" marT="109728" marB="109728" anchor="ctr">
                     <a:lnL w="9525" cap="flat" cmpd="sng" algn="ctr">
                       <a:solidFill>
-                        <a:srgbClr val="D5DDE8"/>
+                        <a:srgbClr val="DDDDDD"/>
                       </a:solidFill>
                       <a:prstDash val="solid"/>
                       <a:round/>
@@ -3117,7 +3569,7 @@
                     </a:lnL>
                     <a:lnR w="9525" cap="flat" cmpd="sng" algn="ctr">
                       <a:solidFill>
-                        <a:srgbClr val="D5DDE8"/>
+                        <a:srgbClr val="DDDDDD"/>
                       </a:solidFill>
                       <a:prstDash val="solid"/>
                       <a:round/>
@@ -3126,7 +3578,7 @@
                     </a:lnR>
                     <a:lnT w="9525" cap="flat" cmpd="sng" algn="ctr">
                       <a:solidFill>
-                        <a:srgbClr val="D5DDE8"/>
+                        <a:srgbClr val="DDDDDD"/>
                       </a:solidFill>
                       <a:prstDash val="solid"/>
                       <a:round/>
@@ -3135,7 +3587,7 @@
                     </a:lnT>
                     <a:lnB w="9525" cap="flat" cmpd="sng" algn="ctr">
                       <a:solidFill>
-                        <a:srgbClr val="D5DDE8"/>
+                        <a:srgbClr val="DDDDDD"/>
                       </a:solidFill>
                       <a:prstDash val="solid"/>
                       <a:round/>
@@ -3143,7 +3595,7 @@
                       <a:tailEnd type="none" w="med" len="med"/>
                     </a:lnB>
                     <a:solidFill>
-                      <a:srgbClr val="F4F7FB"/>
+                      <a:srgbClr val="F5F5F5"/>
                     </a:solidFill>
                   </a:tcPr>
                 </a:tc>
@@ -3176,7 +3628,7 @@
                   <a:tcPr marL="109728" marR="109728" marT="109728" marB="109728" anchor="ctr">
                     <a:lnL w="9525" cap="flat" cmpd="sng" algn="ctr">
                       <a:solidFill>
-                        <a:srgbClr val="D5DDE8"/>
+                        <a:srgbClr val="DDDDDD"/>
                       </a:solidFill>
                       <a:prstDash val="solid"/>
                       <a:round/>
@@ -3185,7 +3637,7 @@
                     </a:lnL>
                     <a:lnR w="9525" cap="flat" cmpd="sng" algn="ctr">
                       <a:solidFill>
-                        <a:srgbClr val="D5DDE8"/>
+                        <a:srgbClr val="DDDDDD"/>
                       </a:solidFill>
                       <a:prstDash val="solid"/>
                       <a:round/>
@@ -3194,7 +3646,7 @@
                     </a:lnR>
                     <a:lnT w="9525" cap="flat" cmpd="sng" algn="ctr">
                       <a:solidFill>
-                        <a:srgbClr val="D5DDE8"/>
+                        <a:srgbClr val="DDDDDD"/>
                       </a:solidFill>
                       <a:prstDash val="solid"/>
                       <a:round/>
@@ -3203,7 +3655,7 @@
                     </a:lnT>
                     <a:lnB w="9525" cap="flat" cmpd="sng" algn="ctr">
                       <a:solidFill>
-                        <a:srgbClr val="D5DDE8"/>
+                        <a:srgbClr val="DDDDDD"/>
                       </a:solidFill>
                       <a:prstDash val="solid"/>
                       <a:round/>
@@ -3211,7 +3663,7 @@
                       <a:tailEnd type="none" w="med" len="med"/>
                     </a:lnB>
                     <a:solidFill>
-                      <a:srgbClr val="F4F7FB"/>
+                      <a:srgbClr val="F5F5F5"/>
                     </a:solidFill>
                   </a:tcPr>
                 </a:tc>
@@ -3228,7 +3680,7 @@
                       <a:r>
                         <a:rPr lang="en-US" sz="1500" b="1" dirty="0">
                           <a:solidFill>
-                            <a:srgbClr val="0F766E"/>
+                            <a:srgbClr val="111111"/>
                           </a:solidFill>
                           <a:latin typeface="Arial" pitchFamily="34" charset="0"/>
                           <a:ea typeface="Arial" pitchFamily="34" charset="-122"/>
@@ -3246,7 +3698,7 @@
                   <a:tcPr marL="109728" marR="109728" marT="109728" marB="109728" anchor="ctr">
                     <a:lnL w="9525" cap="flat" cmpd="sng" algn="ctr">
                       <a:solidFill>
-                        <a:srgbClr val="D5DDE8"/>
+                        <a:srgbClr val="DDDDDD"/>
                       </a:solidFill>
                       <a:prstDash val="solid"/>
                       <a:round/>
@@ -3255,7 +3707,7 @@
                     </a:lnL>
                     <a:lnR w="9525" cap="flat" cmpd="sng" algn="ctr">
                       <a:solidFill>
-                        <a:srgbClr val="D5DDE8"/>
+                        <a:srgbClr val="DDDDDD"/>
                       </a:solidFill>
                       <a:prstDash val="solid"/>
                       <a:round/>
@@ -3264,7 +3716,7 @@
                     </a:lnR>
                     <a:lnT w="9525" cap="flat" cmpd="sng" algn="ctr">
                       <a:solidFill>
-                        <a:srgbClr val="D5DDE8"/>
+                        <a:srgbClr val="DDDDDD"/>
                       </a:solidFill>
                       <a:prstDash val="solid"/>
                       <a:round/>
@@ -3273,7 +3725,7 @@
                     </a:lnT>
                     <a:lnB w="9525" cap="flat" cmpd="sng" algn="ctr">
                       <a:solidFill>
-                        <a:srgbClr val="D5DDE8"/>
+                        <a:srgbClr val="DDDDDD"/>
                       </a:solidFill>
                       <a:prstDash val="solid"/>
                       <a:round/>
@@ -3314,7 +3766,7 @@
                   <a:tcPr marL="109728" marR="109728" marT="109728" marB="109728" anchor="ctr">
                     <a:lnL w="9525" cap="flat" cmpd="sng" algn="ctr">
                       <a:solidFill>
-                        <a:srgbClr val="D5DDE8"/>
+                        <a:srgbClr val="DDDDDD"/>
                       </a:solidFill>
                       <a:prstDash val="solid"/>
                       <a:round/>
@@ -3323,7 +3775,7 @@
                     </a:lnL>
                     <a:lnR w="9525" cap="flat" cmpd="sng" algn="ctr">
                       <a:solidFill>
-                        <a:srgbClr val="D5DDE8"/>
+                        <a:srgbClr val="DDDDDD"/>
                       </a:solidFill>
                       <a:prstDash val="solid"/>
                       <a:round/>
@@ -3332,7 +3784,7 @@
                     </a:lnR>
                     <a:lnT w="9525" cap="flat" cmpd="sng" algn="ctr">
                       <a:solidFill>
-                        <a:srgbClr val="D5DDE8"/>
+                        <a:srgbClr val="DDDDDD"/>
                       </a:solidFill>
                       <a:prstDash val="solid"/>
                       <a:round/>
@@ -3341,7 +3793,7 @@
                     </a:lnT>
                     <a:lnB w="9525" cap="flat" cmpd="sng" algn="ctr">
                       <a:solidFill>
-                        <a:srgbClr val="D5DDE8"/>
+                        <a:srgbClr val="DDDDDD"/>
                       </a:solidFill>
                       <a:prstDash val="solid"/>
                       <a:round/>
@@ -3382,7 +3834,7 @@
                   <a:tcPr marL="109728" marR="109728" marT="109728" marB="109728" anchor="ctr">
                     <a:lnL w="9525" cap="flat" cmpd="sng" algn="ctr">
                       <a:solidFill>
-                        <a:srgbClr val="D5DDE8"/>
+                        <a:srgbClr val="DDDDDD"/>
                       </a:solidFill>
                       <a:prstDash val="solid"/>
                       <a:round/>
@@ -3391,7 +3843,7 @@
                     </a:lnL>
                     <a:lnR w="9525" cap="flat" cmpd="sng" algn="ctr">
                       <a:solidFill>
-                        <a:srgbClr val="D5DDE8"/>
+                        <a:srgbClr val="DDDDDD"/>
                       </a:solidFill>
                       <a:prstDash val="solid"/>
                       <a:round/>
@@ -3400,7 +3852,7 @@
                     </a:lnR>
                     <a:lnT w="9525" cap="flat" cmpd="sng" algn="ctr">
                       <a:solidFill>
-                        <a:srgbClr val="D5DDE8"/>
+                        <a:srgbClr val="DDDDDD"/>
                       </a:solidFill>
                       <a:prstDash val="solid"/>
                       <a:round/>
@@ -3409,7 +3861,7 @@
                     </a:lnT>
                     <a:lnB w="9525" cap="flat" cmpd="sng" algn="ctr">
                       <a:solidFill>
-                        <a:srgbClr val="D5DDE8"/>
+                        <a:srgbClr val="DDDDDD"/>
                       </a:solidFill>
                       <a:prstDash val="solid"/>
                       <a:round/>
@@ -3434,7 +3886,7 @@
                       <a:r>
                         <a:rPr lang="en-US" sz="1500" b="1" dirty="0">
                           <a:solidFill>
-                            <a:srgbClr val="0F766E"/>
+                            <a:srgbClr val="111111"/>
                           </a:solidFill>
                           <a:latin typeface="Arial" pitchFamily="34" charset="0"/>
                           <a:ea typeface="Arial" pitchFamily="34" charset="-122"/>
@@ -3452,7 +3904,7 @@
                   <a:tcPr marL="109728" marR="109728" marT="109728" marB="109728" anchor="ctr">
                     <a:lnL w="9525" cap="flat" cmpd="sng" algn="ctr">
                       <a:solidFill>
-                        <a:srgbClr val="D5DDE8"/>
+                        <a:srgbClr val="DDDDDD"/>
                       </a:solidFill>
                       <a:prstDash val="solid"/>
                       <a:round/>
@@ -3461,7 +3913,7 @@
                     </a:lnL>
                     <a:lnR w="9525" cap="flat" cmpd="sng" algn="ctr">
                       <a:solidFill>
-                        <a:srgbClr val="D5DDE8"/>
+                        <a:srgbClr val="DDDDDD"/>
                       </a:solidFill>
                       <a:prstDash val="solid"/>
                       <a:round/>
@@ -3470,7 +3922,7 @@
                     </a:lnR>
                     <a:lnT w="9525" cap="flat" cmpd="sng" algn="ctr">
                       <a:solidFill>
-                        <a:srgbClr val="D5DDE8"/>
+                        <a:srgbClr val="DDDDDD"/>
                       </a:solidFill>
                       <a:prstDash val="solid"/>
                       <a:round/>
@@ -3479,7 +3931,7 @@
                     </a:lnT>
                     <a:lnB w="9525" cap="flat" cmpd="sng" algn="ctr">
                       <a:solidFill>
-                        <a:srgbClr val="D5DDE8"/>
+                        <a:srgbClr val="DDDDDD"/>
                       </a:solidFill>
                       <a:prstDash val="solid"/>
                       <a:round/>
@@ -3487,7 +3939,7 @@
                       <a:tailEnd type="none" w="med" len="med"/>
                     </a:lnB>
                     <a:solidFill>
-                      <a:srgbClr val="F4F7FB"/>
+                      <a:srgbClr val="F5F5F5"/>
                     </a:solidFill>
                   </a:tcPr>
                 </a:tc>
@@ -3520,7 +3972,7 @@
                   <a:tcPr marL="109728" marR="109728" marT="109728" marB="109728" anchor="ctr">
                     <a:lnL w="9525" cap="flat" cmpd="sng" algn="ctr">
                       <a:solidFill>
-                        <a:srgbClr val="D5DDE8"/>
+                        <a:srgbClr val="DDDDDD"/>
                       </a:solidFill>
                       <a:prstDash val="solid"/>
                       <a:round/>
@@ -3529,7 +3981,7 @@
                     </a:lnL>
                     <a:lnR w="9525" cap="flat" cmpd="sng" algn="ctr">
                       <a:solidFill>
-                        <a:srgbClr val="D5DDE8"/>
+                        <a:srgbClr val="DDDDDD"/>
                       </a:solidFill>
                       <a:prstDash val="solid"/>
                       <a:round/>
@@ -3538,7 +3990,7 @@
                     </a:lnR>
                     <a:lnT w="9525" cap="flat" cmpd="sng" algn="ctr">
                       <a:solidFill>
-                        <a:srgbClr val="D5DDE8"/>
+                        <a:srgbClr val="DDDDDD"/>
                       </a:solidFill>
                       <a:prstDash val="solid"/>
                       <a:round/>
@@ -3547,7 +3999,7 @@
                     </a:lnT>
                     <a:lnB w="9525" cap="flat" cmpd="sng" algn="ctr">
                       <a:solidFill>
-                        <a:srgbClr val="D5DDE8"/>
+                        <a:srgbClr val="DDDDDD"/>
                       </a:solidFill>
                       <a:prstDash val="solid"/>
                       <a:round/>
@@ -3555,7 +4007,7 @@
                       <a:tailEnd type="none" w="med" len="med"/>
                     </a:lnB>
                     <a:solidFill>
-                      <a:srgbClr val="F4F7FB"/>
+                      <a:srgbClr val="F5F5F5"/>
                     </a:solidFill>
                   </a:tcPr>
                 </a:tc>
@@ -3588,7 +4040,7 @@
                   <a:tcPr marL="109728" marR="109728" marT="109728" marB="109728" anchor="ctr">
                     <a:lnL w="9525" cap="flat" cmpd="sng" algn="ctr">
                       <a:solidFill>
-                        <a:srgbClr val="D5DDE8"/>
+                        <a:srgbClr val="DDDDDD"/>
                       </a:solidFill>
                       <a:prstDash val="solid"/>
                       <a:round/>
@@ -3597,7 +4049,7 @@
                     </a:lnL>
                     <a:lnR w="9525" cap="flat" cmpd="sng" algn="ctr">
                       <a:solidFill>
-                        <a:srgbClr val="D5DDE8"/>
+                        <a:srgbClr val="DDDDDD"/>
                       </a:solidFill>
                       <a:prstDash val="solid"/>
                       <a:round/>
@@ -3606,7 +4058,7 @@
                     </a:lnR>
                     <a:lnT w="9525" cap="flat" cmpd="sng" algn="ctr">
                       <a:solidFill>
-                        <a:srgbClr val="D5DDE8"/>
+                        <a:srgbClr val="DDDDDD"/>
                       </a:solidFill>
                       <a:prstDash val="solid"/>
                       <a:round/>
@@ -3615,7 +4067,7 @@
                     </a:lnT>
                     <a:lnB w="9525" cap="flat" cmpd="sng" algn="ctr">
                       <a:solidFill>
-                        <a:srgbClr val="D5DDE8"/>
+                        <a:srgbClr val="DDDDDD"/>
                       </a:solidFill>
                       <a:prstDash val="solid"/>
                       <a:round/>
@@ -3623,7 +4075,7 @@
                       <a:tailEnd type="none" w="med" len="med"/>
                     </a:lnB>
                     <a:solidFill>
-                      <a:srgbClr val="F4F7FB"/>
+                      <a:srgbClr val="F5F5F5"/>
                     </a:solidFill>
                   </a:tcPr>
                 </a:tc>
@@ -3640,7 +4092,7 @@
                       <a:r>
                         <a:rPr lang="en-US" sz="1500" b="1" dirty="0">
                           <a:solidFill>
-                            <a:srgbClr val="0F766E"/>
+                            <a:srgbClr val="111111"/>
                           </a:solidFill>
                           <a:latin typeface="Arial" pitchFamily="34" charset="0"/>
                           <a:ea typeface="Arial" pitchFamily="34" charset="-122"/>
@@ -3658,7 +4110,7 @@
                   <a:tcPr marL="109728" marR="109728" marT="109728" marB="109728" anchor="ctr">
                     <a:lnL w="9525" cap="flat" cmpd="sng" algn="ctr">
                       <a:solidFill>
-                        <a:srgbClr val="D5DDE8"/>
+                        <a:srgbClr val="DDDDDD"/>
                       </a:solidFill>
                       <a:prstDash val="solid"/>
                       <a:round/>
@@ -3667,7 +4119,7 @@
                     </a:lnL>
                     <a:lnR w="9525" cap="flat" cmpd="sng" algn="ctr">
                       <a:solidFill>
-                        <a:srgbClr val="D5DDE8"/>
+                        <a:srgbClr val="DDDDDD"/>
                       </a:solidFill>
                       <a:prstDash val="solid"/>
                       <a:round/>
@@ -3676,7 +4128,7 @@
                     </a:lnR>
                     <a:lnT w="9525" cap="flat" cmpd="sng" algn="ctr">
                       <a:solidFill>
-                        <a:srgbClr val="D5DDE8"/>
+                        <a:srgbClr val="DDDDDD"/>
                       </a:solidFill>
                       <a:prstDash val="solid"/>
                       <a:round/>
@@ -3685,7 +4137,7 @@
                     </a:lnT>
                     <a:lnB w="9525" cap="flat" cmpd="sng" algn="ctr">
                       <a:solidFill>
-                        <a:srgbClr val="D5DDE8"/>
+                        <a:srgbClr val="DDDDDD"/>
                       </a:solidFill>
                       <a:prstDash val="solid"/>
                       <a:round/>
@@ -3726,7 +4178,7 @@
                   <a:tcPr marL="109728" marR="109728" marT="109728" marB="109728" anchor="ctr">
                     <a:lnL w="9525" cap="flat" cmpd="sng" algn="ctr">
                       <a:solidFill>
-                        <a:srgbClr val="D5DDE8"/>
+                        <a:srgbClr val="DDDDDD"/>
                       </a:solidFill>
                       <a:prstDash val="solid"/>
                       <a:round/>
@@ -3735,7 +4187,7 @@
                     </a:lnL>
                     <a:lnR w="9525" cap="flat" cmpd="sng" algn="ctr">
                       <a:solidFill>
-                        <a:srgbClr val="D5DDE8"/>
+                        <a:srgbClr val="DDDDDD"/>
                       </a:solidFill>
                       <a:prstDash val="solid"/>
                       <a:round/>
@@ -3744,7 +4196,7 @@
                     </a:lnR>
                     <a:lnT w="9525" cap="flat" cmpd="sng" algn="ctr">
                       <a:solidFill>
-                        <a:srgbClr val="D5DDE8"/>
+                        <a:srgbClr val="DDDDDD"/>
                       </a:solidFill>
                       <a:prstDash val="solid"/>
                       <a:round/>
@@ -3753,7 +4205,7 @@
                     </a:lnT>
                     <a:lnB w="9525" cap="flat" cmpd="sng" algn="ctr">
                       <a:solidFill>
-                        <a:srgbClr val="D5DDE8"/>
+                        <a:srgbClr val="DDDDDD"/>
                       </a:solidFill>
                       <a:prstDash val="solid"/>
                       <a:round/>
@@ -3794,7 +4246,7 @@
                   <a:tcPr marL="109728" marR="109728" marT="109728" marB="109728" anchor="ctr">
                     <a:lnL w="9525" cap="flat" cmpd="sng" algn="ctr">
                       <a:solidFill>
-                        <a:srgbClr val="D5DDE8"/>
+                        <a:srgbClr val="DDDDDD"/>
                       </a:solidFill>
                       <a:prstDash val="solid"/>
                       <a:round/>
@@ -3803,7 +4255,7 @@
                     </a:lnL>
                     <a:lnR w="9525" cap="flat" cmpd="sng" algn="ctr">
                       <a:solidFill>
-                        <a:srgbClr val="D5DDE8"/>
+                        <a:srgbClr val="DDDDDD"/>
                       </a:solidFill>
                       <a:prstDash val="solid"/>
                       <a:round/>
@@ -3812,7 +4264,7 @@
                     </a:lnR>
                     <a:lnT w="9525" cap="flat" cmpd="sng" algn="ctr">
                       <a:solidFill>
-                        <a:srgbClr val="D5DDE8"/>
+                        <a:srgbClr val="DDDDDD"/>
                       </a:solidFill>
                       <a:prstDash val="solid"/>
                       <a:round/>
@@ -3821,7 +4273,7 @@
                     </a:lnT>
                     <a:lnB w="9525" cap="flat" cmpd="sng" algn="ctr">
                       <a:solidFill>
-                        <a:srgbClr val="D5DDE8"/>
+                        <a:srgbClr val="DDDDDD"/>
                       </a:solidFill>
                       <a:prstDash val="solid"/>
                       <a:round/>
@@ -3916,6 +4368,118 @@
           </a:p>
         </p:txBody>
       </p:sp>
+      <p:sp>
+        <p:nvSpPr>
+          <p:cNvPr id="7" name="Rectangle 6"/>
+          <p:cNvSpPr/>
+          <p:nvPr/>
+        </p:nvSpPr>
+        <p:spPr>
+          <a:xfrm>
+            <a:off x="0" y="0"/>
+            <a:ext cx="12192000" cy="82296"/>
+          </a:xfrm>
+          <a:prstGeom prst="rect">
+            <a:avLst/>
+          </a:prstGeom>
+          <a:solidFill>
+            <a:srgbClr val="111111"/>
+          </a:solidFill>
+          <a:ln>
+            <a:noFill/>
+          </a:ln>
+          <a:effectLst/>
+        </p:spPr>
+        <p:style>
+          <a:lnRef idx="1">
+            <a:schemeClr val="accent1"/>
+          </a:lnRef>
+          <a:fillRef idx="3">
+            <a:schemeClr val="accent1"/>
+          </a:fillRef>
+          <a:effectRef idx="2">
+            <a:schemeClr val="accent1"/>
+          </a:effectRef>
+          <a:fontRef idx="minor">
+            <a:schemeClr val="lt1"/>
+          </a:fontRef>
+        </p:style>
+        <p:txBody>
+          <a:bodyPr rtlCol="0" anchor="ctr"/>
+          <a:lstStyle/>
+          <a:p>
+            <a:pPr algn="ctr"/>
+          </a:p>
+        </p:txBody>
+      </p:sp>
+      <p:sp>
+        <p:nvSpPr>
+          <p:cNvPr id="8" name="Rectangle 7"/>
+          <p:cNvSpPr/>
+          <p:nvPr/>
+        </p:nvSpPr>
+        <p:spPr>
+          <a:xfrm>
+            <a:off x="0" y="82296"/>
+            <a:ext cx="1463040" cy="45720"/>
+          </a:xfrm>
+          <a:prstGeom prst="rect">
+            <a:avLst/>
+          </a:prstGeom>
+          <a:solidFill>
+            <a:srgbClr val="111111"/>
+          </a:solidFill>
+          <a:ln>
+            <a:noFill/>
+          </a:ln>
+          <a:effectLst/>
+        </p:spPr>
+        <p:style>
+          <a:lnRef idx="1">
+            <a:schemeClr val="accent1"/>
+          </a:lnRef>
+          <a:fillRef idx="3">
+            <a:schemeClr val="accent1"/>
+          </a:fillRef>
+          <a:effectRef idx="2">
+            <a:schemeClr val="accent1"/>
+          </a:effectRef>
+          <a:fontRef idx="minor">
+            <a:schemeClr val="lt1"/>
+          </a:fontRef>
+        </p:style>
+        <p:txBody>
+          <a:bodyPr rtlCol="0" anchor="ctr"/>
+          <a:lstStyle/>
+          <a:p>
+            <a:pPr algn="ctr"/>
+          </a:p>
+        </p:txBody>
+      </p:sp>
+      <p:pic>
+        <p:nvPicPr>
+          <p:cNvPr id="9" name="Picture 8" descr="teb_logo.png"/>
+          <p:cNvPicPr>
+            <a:picLocks noChangeAspect="1"/>
+          </p:cNvPicPr>
+          <p:nvPr/>
+        </p:nvPicPr>
+        <p:blipFill>
+          <a:blip r:embed="rId3"/>
+          <a:stretch>
+            <a:fillRect/>
+          </a:stretch>
+        </p:blipFill>
+        <p:spPr>
+          <a:xfrm>
+            <a:off x="10363200" y="6362864"/>
+            <a:ext cx="1005840" cy="331903"/>
+          </a:xfrm>
+          <a:prstGeom prst="rect">
+            <a:avLst/>
+          </a:prstGeom>
+        </p:spPr>
+      </p:pic>
     </p:spTree>
   </p:cSld>
   <p:clrMapOvr>
@@ -3975,7 +4539,7 @@
             <a:r>
               <a:rPr lang="en-US" sz="2600" b="1" dirty="0">
                 <a:solidFill>
-                  <a:srgbClr val="15253D"/>
+                  <a:srgbClr val="111111"/>
                 </a:solidFill>
                 <a:latin typeface="Arial" pitchFamily="34" charset="0"/>
                 <a:ea typeface="Arial" pitchFamily="34" charset="-122"/>
@@ -4083,7 +4647,7 @@
                   <a:tcPr marL="109728" marR="109728" marT="109728" marB="109728" anchor="ctr">
                     <a:lnL w="9525" cap="flat" cmpd="sng" algn="ctr">
                       <a:solidFill>
-                        <a:srgbClr val="D5DDE8"/>
+                        <a:srgbClr val="DDDDDD"/>
                       </a:solidFill>
                       <a:prstDash val="solid"/>
                       <a:round/>
@@ -4092,7 +4656,7 @@
                     </a:lnL>
                     <a:lnR w="9525" cap="flat" cmpd="sng" algn="ctr">
                       <a:solidFill>
-                        <a:srgbClr val="D5DDE8"/>
+                        <a:srgbClr val="DDDDDD"/>
                       </a:solidFill>
                       <a:prstDash val="solid"/>
                       <a:round/>
@@ -4101,7 +4665,7 @@
                     </a:lnR>
                     <a:lnT w="9525" cap="flat" cmpd="sng" algn="ctr">
                       <a:solidFill>
-                        <a:srgbClr val="D5DDE8"/>
+                        <a:srgbClr val="DDDDDD"/>
                       </a:solidFill>
                       <a:prstDash val="solid"/>
                       <a:round/>
@@ -4110,7 +4674,7 @@
                     </a:lnT>
                     <a:lnB w="9525" cap="flat" cmpd="sng" algn="ctr">
                       <a:solidFill>
-                        <a:srgbClr val="D5DDE8"/>
+                        <a:srgbClr val="DDDDDD"/>
                       </a:solidFill>
                       <a:prstDash val="solid"/>
                       <a:round/>
@@ -4118,7 +4682,7 @@
                       <a:tailEnd type="none" w="med" len="med"/>
                     </a:lnB>
                     <a:solidFill>
-                      <a:srgbClr val="15253D"/>
+                      <a:srgbClr val="111111"/>
                     </a:solidFill>
                   </a:tcPr>
                 </a:tc>
@@ -4151,7 +4715,7 @@
                   <a:tcPr marL="109728" marR="109728" marT="109728" marB="109728" anchor="ctr">
                     <a:lnL w="9525" cap="flat" cmpd="sng" algn="ctr">
                       <a:solidFill>
-                        <a:srgbClr val="D5DDE8"/>
+                        <a:srgbClr val="DDDDDD"/>
                       </a:solidFill>
                       <a:prstDash val="solid"/>
                       <a:round/>
@@ -4160,7 +4724,7 @@
                     </a:lnL>
                     <a:lnR w="9525" cap="flat" cmpd="sng" algn="ctr">
                       <a:solidFill>
-                        <a:srgbClr val="D5DDE8"/>
+                        <a:srgbClr val="DDDDDD"/>
                       </a:solidFill>
                       <a:prstDash val="solid"/>
                       <a:round/>
@@ -4169,7 +4733,7 @@
                     </a:lnR>
                     <a:lnT w="9525" cap="flat" cmpd="sng" algn="ctr">
                       <a:solidFill>
-                        <a:srgbClr val="D5DDE8"/>
+                        <a:srgbClr val="DDDDDD"/>
                       </a:solidFill>
                       <a:prstDash val="solid"/>
                       <a:round/>
@@ -4178,7 +4742,7 @@
                     </a:lnT>
                     <a:lnB w="9525" cap="flat" cmpd="sng" algn="ctr">
                       <a:solidFill>
-                        <a:srgbClr val="D5DDE8"/>
+                        <a:srgbClr val="DDDDDD"/>
                       </a:solidFill>
                       <a:prstDash val="solid"/>
                       <a:round/>
@@ -4186,7 +4750,7 @@
                       <a:tailEnd type="none" w="med" len="med"/>
                     </a:lnB>
                     <a:solidFill>
-                      <a:srgbClr val="15253D"/>
+                      <a:srgbClr val="111111"/>
                     </a:solidFill>
                   </a:tcPr>
                 </a:tc>
@@ -4219,7 +4783,7 @@
                   <a:tcPr marL="109728" marR="109728" marT="109728" marB="109728" anchor="ctr">
                     <a:lnL w="9525" cap="flat" cmpd="sng" algn="ctr">
                       <a:solidFill>
-                        <a:srgbClr val="D5DDE8"/>
+                        <a:srgbClr val="DDDDDD"/>
                       </a:solidFill>
                       <a:prstDash val="solid"/>
                       <a:round/>
@@ -4228,7 +4792,7 @@
                     </a:lnL>
                     <a:lnR w="9525" cap="flat" cmpd="sng" algn="ctr">
                       <a:solidFill>
-                        <a:srgbClr val="D5DDE8"/>
+                        <a:srgbClr val="DDDDDD"/>
                       </a:solidFill>
                       <a:prstDash val="solid"/>
                       <a:round/>
@@ -4237,7 +4801,7 @@
                     </a:lnR>
                     <a:lnT w="9525" cap="flat" cmpd="sng" algn="ctr">
                       <a:solidFill>
-                        <a:srgbClr val="D5DDE8"/>
+                        <a:srgbClr val="DDDDDD"/>
                       </a:solidFill>
                       <a:prstDash val="solid"/>
                       <a:round/>
@@ -4246,7 +4810,7 @@
                     </a:lnT>
                     <a:lnB w="9525" cap="flat" cmpd="sng" algn="ctr">
                       <a:solidFill>
-                        <a:srgbClr val="D5DDE8"/>
+                        <a:srgbClr val="DDDDDD"/>
                       </a:solidFill>
                       <a:prstDash val="solid"/>
                       <a:round/>
@@ -4254,7 +4818,7 @@
                       <a:tailEnd type="none" w="med" len="med"/>
                     </a:lnB>
                     <a:solidFill>
-                      <a:srgbClr val="15253D"/>
+                      <a:srgbClr val="111111"/>
                     </a:solidFill>
                   </a:tcPr>
                 </a:tc>
@@ -4271,7 +4835,7 @@
                       <a:r>
                         <a:rPr lang="en-US" sz="1500" b="1" dirty="0">
                           <a:solidFill>
-                            <a:srgbClr val="0F766E"/>
+                            <a:srgbClr val="111111"/>
                           </a:solidFill>
                           <a:latin typeface="Arial" pitchFamily="34" charset="0"/>
                           <a:ea typeface="Arial" pitchFamily="34" charset="-122"/>
@@ -4289,7 +4853,7 @@
                   <a:tcPr marL="109728" marR="109728" marT="109728" marB="109728" anchor="ctr">
                     <a:lnL w="9525" cap="flat" cmpd="sng" algn="ctr">
                       <a:solidFill>
-                        <a:srgbClr val="D5DDE8"/>
+                        <a:srgbClr val="DDDDDD"/>
                       </a:solidFill>
                       <a:prstDash val="solid"/>
                       <a:round/>
@@ -4298,7 +4862,7 @@
                     </a:lnL>
                     <a:lnR w="9525" cap="flat" cmpd="sng" algn="ctr">
                       <a:solidFill>
-                        <a:srgbClr val="D5DDE8"/>
+                        <a:srgbClr val="DDDDDD"/>
                       </a:solidFill>
                       <a:prstDash val="solid"/>
                       <a:round/>
@@ -4307,7 +4871,7 @@
                     </a:lnR>
                     <a:lnT w="9525" cap="flat" cmpd="sng" algn="ctr">
                       <a:solidFill>
-                        <a:srgbClr val="D5DDE8"/>
+                        <a:srgbClr val="DDDDDD"/>
                       </a:solidFill>
                       <a:prstDash val="solid"/>
                       <a:round/>
@@ -4316,7 +4880,7 @@
                     </a:lnT>
                     <a:lnB w="9525" cap="flat" cmpd="sng" algn="ctr">
                       <a:solidFill>
-                        <a:srgbClr val="D5DDE8"/>
+                        <a:srgbClr val="DDDDDD"/>
                       </a:solidFill>
                       <a:prstDash val="solid"/>
                       <a:round/>
@@ -4324,7 +4888,7 @@
                       <a:tailEnd type="none" w="med" len="med"/>
                     </a:lnB>
                     <a:solidFill>
-                      <a:srgbClr val="F4F7FB"/>
+                      <a:srgbClr val="F5F5F5"/>
                     </a:solidFill>
                   </a:tcPr>
                 </a:tc>
@@ -4357,7 +4921,7 @@
                   <a:tcPr marL="109728" marR="109728" marT="109728" marB="109728" anchor="ctr">
                     <a:lnL w="9525" cap="flat" cmpd="sng" algn="ctr">
                       <a:solidFill>
-                        <a:srgbClr val="D5DDE8"/>
+                        <a:srgbClr val="DDDDDD"/>
                       </a:solidFill>
                       <a:prstDash val="solid"/>
                       <a:round/>
@@ -4366,7 +4930,7 @@
                     </a:lnL>
                     <a:lnR w="9525" cap="flat" cmpd="sng" algn="ctr">
                       <a:solidFill>
-                        <a:srgbClr val="D5DDE8"/>
+                        <a:srgbClr val="DDDDDD"/>
                       </a:solidFill>
                       <a:prstDash val="solid"/>
                       <a:round/>
@@ -4375,7 +4939,7 @@
                     </a:lnR>
                     <a:lnT w="9525" cap="flat" cmpd="sng" algn="ctr">
                       <a:solidFill>
-                        <a:srgbClr val="D5DDE8"/>
+                        <a:srgbClr val="DDDDDD"/>
                       </a:solidFill>
                       <a:prstDash val="solid"/>
                       <a:round/>
@@ -4384,7 +4948,7 @@
                     </a:lnT>
                     <a:lnB w="9525" cap="flat" cmpd="sng" algn="ctr">
                       <a:solidFill>
-                        <a:srgbClr val="D5DDE8"/>
+                        <a:srgbClr val="DDDDDD"/>
                       </a:solidFill>
                       <a:prstDash val="solid"/>
                       <a:round/>
@@ -4392,7 +4956,7 @@
                       <a:tailEnd type="none" w="med" len="med"/>
                     </a:lnB>
                     <a:solidFill>
-                      <a:srgbClr val="F4F7FB"/>
+                      <a:srgbClr val="F5F5F5"/>
                     </a:solidFill>
                   </a:tcPr>
                 </a:tc>
@@ -4425,7 +4989,7 @@
                   <a:tcPr marL="109728" marR="109728" marT="109728" marB="109728" anchor="ctr">
                     <a:lnL w="9525" cap="flat" cmpd="sng" algn="ctr">
                       <a:solidFill>
-                        <a:srgbClr val="D5DDE8"/>
+                        <a:srgbClr val="DDDDDD"/>
                       </a:solidFill>
                       <a:prstDash val="solid"/>
                       <a:round/>
@@ -4434,7 +4998,7 @@
                     </a:lnL>
                     <a:lnR w="9525" cap="flat" cmpd="sng" algn="ctr">
                       <a:solidFill>
-                        <a:srgbClr val="D5DDE8"/>
+                        <a:srgbClr val="DDDDDD"/>
                       </a:solidFill>
                       <a:prstDash val="solid"/>
                       <a:round/>
@@ -4443,7 +5007,7 @@
                     </a:lnR>
                     <a:lnT w="9525" cap="flat" cmpd="sng" algn="ctr">
                       <a:solidFill>
-                        <a:srgbClr val="D5DDE8"/>
+                        <a:srgbClr val="DDDDDD"/>
                       </a:solidFill>
                       <a:prstDash val="solid"/>
                       <a:round/>
@@ -4452,7 +5016,7 @@
                     </a:lnT>
                     <a:lnB w="9525" cap="flat" cmpd="sng" algn="ctr">
                       <a:solidFill>
-                        <a:srgbClr val="D5DDE8"/>
+                        <a:srgbClr val="DDDDDD"/>
                       </a:solidFill>
                       <a:prstDash val="solid"/>
                       <a:round/>
@@ -4460,7 +5024,7 @@
                       <a:tailEnd type="none" w="med" len="med"/>
                     </a:lnB>
                     <a:solidFill>
-                      <a:srgbClr val="F4F7FB"/>
+                      <a:srgbClr val="F5F5F5"/>
                     </a:solidFill>
                   </a:tcPr>
                 </a:tc>
@@ -4477,7 +5041,7 @@
                       <a:r>
                         <a:rPr lang="en-US" sz="1500" b="1" dirty="0">
                           <a:solidFill>
-                            <a:srgbClr val="0F766E"/>
+                            <a:srgbClr val="111111"/>
                           </a:solidFill>
                           <a:latin typeface="Arial" pitchFamily="34" charset="0"/>
                           <a:ea typeface="Arial" pitchFamily="34" charset="-122"/>
@@ -4495,7 +5059,7 @@
                   <a:tcPr marL="109728" marR="109728" marT="109728" marB="109728" anchor="ctr">
                     <a:lnL w="9525" cap="flat" cmpd="sng" algn="ctr">
                       <a:solidFill>
-                        <a:srgbClr val="D5DDE8"/>
+                        <a:srgbClr val="DDDDDD"/>
                       </a:solidFill>
                       <a:prstDash val="solid"/>
                       <a:round/>
@@ -4504,7 +5068,7 @@
                     </a:lnL>
                     <a:lnR w="9525" cap="flat" cmpd="sng" algn="ctr">
                       <a:solidFill>
-                        <a:srgbClr val="D5DDE8"/>
+                        <a:srgbClr val="DDDDDD"/>
                       </a:solidFill>
                       <a:prstDash val="solid"/>
                       <a:round/>
@@ -4513,7 +5077,7 @@
                     </a:lnR>
                     <a:lnT w="9525" cap="flat" cmpd="sng" algn="ctr">
                       <a:solidFill>
-                        <a:srgbClr val="D5DDE8"/>
+                        <a:srgbClr val="DDDDDD"/>
                       </a:solidFill>
                       <a:prstDash val="solid"/>
                       <a:round/>
@@ -4522,7 +5086,7 @@
                     </a:lnT>
                     <a:lnB w="9525" cap="flat" cmpd="sng" algn="ctr">
                       <a:solidFill>
-                        <a:srgbClr val="D5DDE8"/>
+                        <a:srgbClr val="DDDDDD"/>
                       </a:solidFill>
                       <a:prstDash val="solid"/>
                       <a:round/>
@@ -4563,7 +5127,7 @@
                   <a:tcPr marL="109728" marR="109728" marT="109728" marB="109728" anchor="ctr">
                     <a:lnL w="9525" cap="flat" cmpd="sng" algn="ctr">
                       <a:solidFill>
-                        <a:srgbClr val="D5DDE8"/>
+                        <a:srgbClr val="DDDDDD"/>
                       </a:solidFill>
                       <a:prstDash val="solid"/>
                       <a:round/>
@@ -4572,7 +5136,7 @@
                     </a:lnL>
                     <a:lnR w="9525" cap="flat" cmpd="sng" algn="ctr">
                       <a:solidFill>
-                        <a:srgbClr val="D5DDE8"/>
+                        <a:srgbClr val="DDDDDD"/>
                       </a:solidFill>
                       <a:prstDash val="solid"/>
                       <a:round/>
@@ -4581,7 +5145,7 @@
                     </a:lnR>
                     <a:lnT w="9525" cap="flat" cmpd="sng" algn="ctr">
                       <a:solidFill>
-                        <a:srgbClr val="D5DDE8"/>
+                        <a:srgbClr val="DDDDDD"/>
                       </a:solidFill>
                       <a:prstDash val="solid"/>
                       <a:round/>
@@ -4590,7 +5154,7 @@
                     </a:lnT>
                     <a:lnB w="9525" cap="flat" cmpd="sng" algn="ctr">
                       <a:solidFill>
-                        <a:srgbClr val="D5DDE8"/>
+                        <a:srgbClr val="DDDDDD"/>
                       </a:solidFill>
                       <a:prstDash val="solid"/>
                       <a:round/>
@@ -4631,7 +5195,7 @@
                   <a:tcPr marL="109728" marR="109728" marT="109728" marB="109728" anchor="ctr">
                     <a:lnL w="9525" cap="flat" cmpd="sng" algn="ctr">
                       <a:solidFill>
-                        <a:srgbClr val="D5DDE8"/>
+                        <a:srgbClr val="DDDDDD"/>
                       </a:solidFill>
                       <a:prstDash val="solid"/>
                       <a:round/>
@@ -4640,7 +5204,7 @@
                     </a:lnL>
                     <a:lnR w="9525" cap="flat" cmpd="sng" algn="ctr">
                       <a:solidFill>
-                        <a:srgbClr val="D5DDE8"/>
+                        <a:srgbClr val="DDDDDD"/>
                       </a:solidFill>
                       <a:prstDash val="solid"/>
                       <a:round/>
@@ -4649,7 +5213,7 @@
                     </a:lnR>
                     <a:lnT w="9525" cap="flat" cmpd="sng" algn="ctr">
                       <a:solidFill>
-                        <a:srgbClr val="D5DDE8"/>
+                        <a:srgbClr val="DDDDDD"/>
                       </a:solidFill>
                       <a:prstDash val="solid"/>
                       <a:round/>
@@ -4658,7 +5222,7 @@
                     </a:lnT>
                     <a:lnB w="9525" cap="flat" cmpd="sng" algn="ctr">
                       <a:solidFill>
-                        <a:srgbClr val="D5DDE8"/>
+                        <a:srgbClr val="DDDDDD"/>
                       </a:solidFill>
                       <a:prstDash val="solid"/>
                       <a:round/>
@@ -4683,7 +5247,7 @@
                       <a:r>
                         <a:rPr lang="en-US" sz="1500" b="1" dirty="0">
                           <a:solidFill>
-                            <a:srgbClr val="0F766E"/>
+                            <a:srgbClr val="111111"/>
                           </a:solidFill>
                           <a:latin typeface="Arial" pitchFamily="34" charset="0"/>
                           <a:ea typeface="Arial" pitchFamily="34" charset="-122"/>
@@ -4701,7 +5265,7 @@
                   <a:tcPr marL="109728" marR="109728" marT="109728" marB="109728" anchor="ctr">
                     <a:lnL w="9525" cap="flat" cmpd="sng" algn="ctr">
                       <a:solidFill>
-                        <a:srgbClr val="D5DDE8"/>
+                        <a:srgbClr val="DDDDDD"/>
                       </a:solidFill>
                       <a:prstDash val="solid"/>
                       <a:round/>
@@ -4710,7 +5274,7 @@
                     </a:lnL>
                     <a:lnR w="9525" cap="flat" cmpd="sng" algn="ctr">
                       <a:solidFill>
-                        <a:srgbClr val="D5DDE8"/>
+                        <a:srgbClr val="DDDDDD"/>
                       </a:solidFill>
                       <a:prstDash val="solid"/>
                       <a:round/>
@@ -4719,7 +5283,7 @@
                     </a:lnR>
                     <a:lnT w="9525" cap="flat" cmpd="sng" algn="ctr">
                       <a:solidFill>
-                        <a:srgbClr val="D5DDE8"/>
+                        <a:srgbClr val="DDDDDD"/>
                       </a:solidFill>
                       <a:prstDash val="solid"/>
                       <a:round/>
@@ -4728,7 +5292,7 @@
                     </a:lnT>
                     <a:lnB w="9525" cap="flat" cmpd="sng" algn="ctr">
                       <a:solidFill>
-                        <a:srgbClr val="D5DDE8"/>
+                        <a:srgbClr val="DDDDDD"/>
                       </a:solidFill>
                       <a:prstDash val="solid"/>
                       <a:round/>
@@ -4736,7 +5300,7 @@
                       <a:tailEnd type="none" w="med" len="med"/>
                     </a:lnB>
                     <a:solidFill>
-                      <a:srgbClr val="F4F7FB"/>
+                      <a:srgbClr val="F5F5F5"/>
                     </a:solidFill>
                   </a:tcPr>
                 </a:tc>
@@ -4769,7 +5333,7 @@
                   <a:tcPr marL="109728" marR="109728" marT="109728" marB="109728" anchor="ctr">
                     <a:lnL w="9525" cap="flat" cmpd="sng" algn="ctr">
                       <a:solidFill>
-                        <a:srgbClr val="D5DDE8"/>
+                        <a:srgbClr val="DDDDDD"/>
                       </a:solidFill>
                       <a:prstDash val="solid"/>
                       <a:round/>
@@ -4778,7 +5342,7 @@
                     </a:lnL>
                     <a:lnR w="9525" cap="flat" cmpd="sng" algn="ctr">
                       <a:solidFill>
-                        <a:srgbClr val="D5DDE8"/>
+                        <a:srgbClr val="DDDDDD"/>
                       </a:solidFill>
                       <a:prstDash val="solid"/>
                       <a:round/>
@@ -4787,7 +5351,7 @@
                     </a:lnR>
                     <a:lnT w="9525" cap="flat" cmpd="sng" algn="ctr">
                       <a:solidFill>
-                        <a:srgbClr val="D5DDE8"/>
+                        <a:srgbClr val="DDDDDD"/>
                       </a:solidFill>
                       <a:prstDash val="solid"/>
                       <a:round/>
@@ -4796,7 +5360,7 @@
                     </a:lnT>
                     <a:lnB w="9525" cap="flat" cmpd="sng" algn="ctr">
                       <a:solidFill>
-                        <a:srgbClr val="D5DDE8"/>
+                        <a:srgbClr val="DDDDDD"/>
                       </a:solidFill>
                       <a:prstDash val="solid"/>
                       <a:round/>
@@ -4804,7 +5368,7 @@
                       <a:tailEnd type="none" w="med" len="med"/>
                     </a:lnB>
                     <a:solidFill>
-                      <a:srgbClr val="F4F7FB"/>
+                      <a:srgbClr val="F5F5F5"/>
                     </a:solidFill>
                   </a:tcPr>
                 </a:tc>
@@ -4837,7 +5401,7 @@
                   <a:tcPr marL="109728" marR="109728" marT="109728" marB="109728" anchor="ctr">
                     <a:lnL w="9525" cap="flat" cmpd="sng" algn="ctr">
                       <a:solidFill>
-                        <a:srgbClr val="D5DDE8"/>
+                        <a:srgbClr val="DDDDDD"/>
                       </a:solidFill>
                       <a:prstDash val="solid"/>
                       <a:round/>
@@ -4846,7 +5410,7 @@
                     </a:lnL>
                     <a:lnR w="9525" cap="flat" cmpd="sng" algn="ctr">
                       <a:solidFill>
-                        <a:srgbClr val="D5DDE8"/>
+                        <a:srgbClr val="DDDDDD"/>
                       </a:solidFill>
                       <a:prstDash val="solid"/>
                       <a:round/>
@@ -4855,7 +5419,7 @@
                     </a:lnR>
                     <a:lnT w="9525" cap="flat" cmpd="sng" algn="ctr">
                       <a:solidFill>
-                        <a:srgbClr val="D5DDE8"/>
+                        <a:srgbClr val="DDDDDD"/>
                       </a:solidFill>
                       <a:prstDash val="solid"/>
                       <a:round/>
@@ -4864,7 +5428,7 @@
                     </a:lnT>
                     <a:lnB w="9525" cap="flat" cmpd="sng" algn="ctr">
                       <a:solidFill>
-                        <a:srgbClr val="D5DDE8"/>
+                        <a:srgbClr val="DDDDDD"/>
                       </a:solidFill>
                       <a:prstDash val="solid"/>
                       <a:round/>
@@ -4872,7 +5436,7 @@
                       <a:tailEnd type="none" w="med" len="med"/>
                     </a:lnB>
                     <a:solidFill>
-                      <a:srgbClr val="F4F7FB"/>
+                      <a:srgbClr val="F5F5F5"/>
                     </a:solidFill>
                   </a:tcPr>
                 </a:tc>
@@ -4959,6 +5523,118 @@
           </a:p>
         </p:txBody>
       </p:sp>
+      <p:sp>
+        <p:nvSpPr>
+          <p:cNvPr id="8" name="Rectangle 7"/>
+          <p:cNvSpPr/>
+          <p:nvPr/>
+        </p:nvSpPr>
+        <p:spPr>
+          <a:xfrm>
+            <a:off x="0" y="0"/>
+            <a:ext cx="12192000" cy="82296"/>
+          </a:xfrm>
+          <a:prstGeom prst="rect">
+            <a:avLst/>
+          </a:prstGeom>
+          <a:solidFill>
+            <a:srgbClr val="111111"/>
+          </a:solidFill>
+          <a:ln>
+            <a:noFill/>
+          </a:ln>
+          <a:effectLst/>
+        </p:spPr>
+        <p:style>
+          <a:lnRef idx="1">
+            <a:schemeClr val="accent1"/>
+          </a:lnRef>
+          <a:fillRef idx="3">
+            <a:schemeClr val="accent1"/>
+          </a:fillRef>
+          <a:effectRef idx="2">
+            <a:schemeClr val="accent1"/>
+          </a:effectRef>
+          <a:fontRef idx="minor">
+            <a:schemeClr val="lt1"/>
+          </a:fontRef>
+        </p:style>
+        <p:txBody>
+          <a:bodyPr rtlCol="0" anchor="ctr"/>
+          <a:lstStyle/>
+          <a:p>
+            <a:pPr algn="ctr"/>
+          </a:p>
+        </p:txBody>
+      </p:sp>
+      <p:sp>
+        <p:nvSpPr>
+          <p:cNvPr id="9" name="Rectangle 8"/>
+          <p:cNvSpPr/>
+          <p:nvPr/>
+        </p:nvSpPr>
+        <p:spPr>
+          <a:xfrm>
+            <a:off x="0" y="82296"/>
+            <a:ext cx="1463040" cy="45720"/>
+          </a:xfrm>
+          <a:prstGeom prst="rect">
+            <a:avLst/>
+          </a:prstGeom>
+          <a:solidFill>
+            <a:srgbClr val="111111"/>
+          </a:solidFill>
+          <a:ln>
+            <a:noFill/>
+          </a:ln>
+          <a:effectLst/>
+        </p:spPr>
+        <p:style>
+          <a:lnRef idx="1">
+            <a:schemeClr val="accent1"/>
+          </a:lnRef>
+          <a:fillRef idx="3">
+            <a:schemeClr val="accent1"/>
+          </a:fillRef>
+          <a:effectRef idx="2">
+            <a:schemeClr val="accent1"/>
+          </a:effectRef>
+          <a:fontRef idx="minor">
+            <a:schemeClr val="lt1"/>
+          </a:fontRef>
+        </p:style>
+        <p:txBody>
+          <a:bodyPr rtlCol="0" anchor="ctr"/>
+          <a:lstStyle/>
+          <a:p>
+            <a:pPr algn="ctr"/>
+          </a:p>
+        </p:txBody>
+      </p:sp>
+      <p:pic>
+        <p:nvPicPr>
+          <p:cNvPr id="10" name="Picture 9" descr="teb_logo.png"/>
+          <p:cNvPicPr>
+            <a:picLocks noChangeAspect="1"/>
+          </p:cNvPicPr>
+          <p:nvPr/>
+        </p:nvPicPr>
+        <p:blipFill>
+          <a:blip r:embed="rId3"/>
+          <a:stretch>
+            <a:fillRect/>
+          </a:stretch>
+        </p:blipFill>
+        <p:spPr>
+          <a:xfrm>
+            <a:off x="10363200" y="6362864"/>
+            <a:ext cx="1005840" cy="331903"/>
+          </a:xfrm>
+          <a:prstGeom prst="rect">
+            <a:avLst/>
+          </a:prstGeom>
+        </p:spPr>
+      </p:pic>
     </p:spTree>
   </p:cSld>
   <p:clrMapOvr>
@@ -5018,7 +5694,7 @@
             <a:r>
               <a:rPr lang="en-US" sz="2600" b="1" dirty="0">
                 <a:solidFill>
-                  <a:srgbClr val="15253D"/>
+                  <a:srgbClr val="111111"/>
                 </a:solidFill>
                 <a:latin typeface="Arial" pitchFamily="34" charset="0"/>
                 <a:ea typeface="Arial" pitchFamily="34" charset="-122"/>
@@ -5057,7 +5733,7 @@
             <a:r>
               <a:rPr lang="en-US" sz="1500" b="1" dirty="0">
                 <a:solidFill>
-                  <a:srgbClr val="0F766E"/>
+                  <a:srgbClr val="111111"/>
                 </a:solidFill>
                 <a:latin typeface="Arial" pitchFamily="34" charset="0"/>
                 <a:ea typeface="Arial" pitchFamily="34" charset="-122"/>
@@ -5202,7 +5878,7 @@
             <a:r>
               <a:rPr lang="en-US" sz="1500" b="1" dirty="0">
                 <a:solidFill>
-                  <a:srgbClr val="EA580C"/>
+                  <a:srgbClr val="111111"/>
                 </a:solidFill>
                 <a:latin typeface="Arial" pitchFamily="34" charset="0"/>
                 <a:ea typeface="Arial" pitchFamily="34" charset="-122"/>
@@ -5229,11 +5905,11 @@
             <a:avLst/>
           </a:prstGeom>
           <a:solidFill>
-            <a:srgbClr val="F4F7FB"/>
+            <a:srgbClr val="F5F5F5"/>
           </a:solidFill>
           <a:ln w="12700">
             <a:solidFill>
-              <a:srgbClr val="F4F7FB"/>
+              <a:srgbClr val="F5F5F5"/>
             </a:solidFill>
             <a:prstDash val="solid"/>
           </a:ln>
@@ -5373,11 +6049,11 @@
             <a:avLst/>
           </a:prstGeom>
           <a:solidFill>
-            <a:srgbClr val="F4F7FB"/>
+            <a:srgbClr val="F5F5F5"/>
           </a:solidFill>
           <a:ln w="12700">
             <a:solidFill>
-              <a:srgbClr val="F4F7FB"/>
+              <a:srgbClr val="F5F5F5"/>
             </a:solidFill>
             <a:prstDash val="solid"/>
           </a:ln>
@@ -5517,11 +6193,11 @@
             <a:avLst/>
           </a:prstGeom>
           <a:solidFill>
-            <a:srgbClr val="F4F7FB"/>
+            <a:srgbClr val="F5F5F5"/>
           </a:solidFill>
           <a:ln w="12700">
             <a:solidFill>
-              <a:srgbClr val="F4F7FB"/>
+              <a:srgbClr val="F5F5F5"/>
             </a:solidFill>
             <a:prstDash val="solid"/>
           </a:ln>
@@ -5661,11 +6337,11 @@
             <a:avLst/>
           </a:prstGeom>
           <a:solidFill>
-            <a:srgbClr val="F4F7FB"/>
+            <a:srgbClr val="F5F5F5"/>
           </a:solidFill>
           <a:ln w="12700">
             <a:solidFill>
-              <a:srgbClr val="F4F7FB"/>
+              <a:srgbClr val="F5F5F5"/>
             </a:solidFill>
             <a:prstDash val="solid"/>
           </a:ln>
@@ -5868,6 +6544,118 @@
           </a:p>
         </p:txBody>
       </p:sp>
+      <p:sp>
+        <p:nvSpPr>
+          <p:cNvPr id="24" name="Rectangle 23"/>
+          <p:cNvSpPr/>
+          <p:nvPr/>
+        </p:nvSpPr>
+        <p:spPr>
+          <a:xfrm>
+            <a:off x="0" y="0"/>
+            <a:ext cx="12192000" cy="82296"/>
+          </a:xfrm>
+          <a:prstGeom prst="rect">
+            <a:avLst/>
+          </a:prstGeom>
+          <a:solidFill>
+            <a:srgbClr val="111111"/>
+          </a:solidFill>
+          <a:ln>
+            <a:noFill/>
+          </a:ln>
+          <a:effectLst/>
+        </p:spPr>
+        <p:style>
+          <a:lnRef idx="1">
+            <a:schemeClr val="accent1"/>
+          </a:lnRef>
+          <a:fillRef idx="3">
+            <a:schemeClr val="accent1"/>
+          </a:fillRef>
+          <a:effectRef idx="2">
+            <a:schemeClr val="accent1"/>
+          </a:effectRef>
+          <a:fontRef idx="minor">
+            <a:schemeClr val="lt1"/>
+          </a:fontRef>
+        </p:style>
+        <p:txBody>
+          <a:bodyPr rtlCol="0" anchor="ctr"/>
+          <a:lstStyle/>
+          <a:p>
+            <a:pPr algn="ctr"/>
+          </a:p>
+        </p:txBody>
+      </p:sp>
+      <p:sp>
+        <p:nvSpPr>
+          <p:cNvPr id="25" name="Rectangle 24"/>
+          <p:cNvSpPr/>
+          <p:nvPr/>
+        </p:nvSpPr>
+        <p:spPr>
+          <a:xfrm>
+            <a:off x="0" y="82296"/>
+            <a:ext cx="1463040" cy="45720"/>
+          </a:xfrm>
+          <a:prstGeom prst="rect">
+            <a:avLst/>
+          </a:prstGeom>
+          <a:solidFill>
+            <a:srgbClr val="111111"/>
+          </a:solidFill>
+          <a:ln>
+            <a:noFill/>
+          </a:ln>
+          <a:effectLst/>
+        </p:spPr>
+        <p:style>
+          <a:lnRef idx="1">
+            <a:schemeClr val="accent1"/>
+          </a:lnRef>
+          <a:fillRef idx="3">
+            <a:schemeClr val="accent1"/>
+          </a:fillRef>
+          <a:effectRef idx="2">
+            <a:schemeClr val="accent1"/>
+          </a:effectRef>
+          <a:fontRef idx="minor">
+            <a:schemeClr val="lt1"/>
+          </a:fontRef>
+        </p:style>
+        <p:txBody>
+          <a:bodyPr rtlCol="0" anchor="ctr"/>
+          <a:lstStyle/>
+          <a:p>
+            <a:pPr algn="ctr"/>
+          </a:p>
+        </p:txBody>
+      </p:sp>
+      <p:pic>
+        <p:nvPicPr>
+          <p:cNvPr id="26" name="Picture 25" descr="teb_logo.png"/>
+          <p:cNvPicPr>
+            <a:picLocks noChangeAspect="1"/>
+          </p:cNvPicPr>
+          <p:nvPr/>
+        </p:nvPicPr>
+        <p:blipFill>
+          <a:blip r:embed="rId3"/>
+          <a:stretch>
+            <a:fillRect/>
+          </a:stretch>
+        </p:blipFill>
+        <p:spPr>
+          <a:xfrm>
+            <a:off x="10363200" y="6362864"/>
+            <a:ext cx="1005840" cy="331903"/>
+          </a:xfrm>
+          <a:prstGeom prst="rect">
+            <a:avLst/>
+          </a:prstGeom>
+        </p:spPr>
+      </p:pic>
     </p:spTree>
   </p:cSld>
   <p:clrMapOvr>

--- a/01-delivered-case-studies/ecommerce-boss-event-automation/Deck/Executive_Deck.pptx
+++ b/01-delivered-case-studies/ecommerce-boss-event-automation/Deck/Executive_Deck.pptx
@@ -1680,7 +1680,7 @@
                 <a:ea typeface="Arial" pitchFamily="34" charset="-122"/>
                 <a:cs typeface="Arial" pitchFamily="34" charset="-120"/>
               </a:rPr>
-              <a:t>Founder and Lead Business Analyst</a:t>
+              <a:t>Business Analyst</a:t>
             </a:r>
             <a:endParaRPr lang="en-US" sz="1400" dirty="0"/>
           </a:p>
@@ -1893,6 +1893,10 @@
             <a:prstDash val="solid"/>
           </a:ln>
         </p:spPr>
+        <p:txBody>
+          <a:bodyPr/>
+          <a:p/>
+        </p:txBody>
       </p:sp>
       <p:sp>
         <p:nvSpPr>
@@ -2035,6 +2039,10 @@
             <a:prstDash val="solid"/>
           </a:ln>
         </p:spPr>
+        <p:txBody>
+          <a:bodyPr/>
+          <a:p/>
+        </p:txBody>
       </p:sp>
       <p:sp>
         <p:nvSpPr>
@@ -2138,6 +2146,10 @@
             <a:prstDash val="solid"/>
           </a:ln>
         </p:spPr>
+        <p:txBody>
+          <a:bodyPr/>
+          <a:p/>
+        </p:txBody>
       </p:sp>
       <p:sp>
         <p:nvSpPr>
@@ -2241,6 +2253,10 @@
             <a:prstDash val="solid"/>
           </a:ln>
         </p:spPr>
+        <p:txBody>
+          <a:bodyPr/>
+          <a:p/>
+        </p:txBody>
       </p:sp>
       <p:sp>
         <p:nvSpPr>
@@ -5914,6 +5930,10 @@
             <a:prstDash val="solid"/>
           </a:ln>
         </p:spPr>
+        <p:txBody>
+          <a:bodyPr/>
+          <a:p/>
+        </p:txBody>
       </p:sp>
       <p:sp>
         <p:nvSpPr>
@@ -6058,6 +6078,10 @@
             <a:prstDash val="solid"/>
           </a:ln>
         </p:spPr>
+        <p:txBody>
+          <a:bodyPr/>
+          <a:p/>
+        </p:txBody>
       </p:sp>
       <p:sp>
         <p:nvSpPr>
@@ -6202,6 +6226,10 @@
             <a:prstDash val="solid"/>
           </a:ln>
         </p:spPr>
+        <p:txBody>
+          <a:bodyPr/>
+          <a:p/>
+        </p:txBody>
       </p:sp>
       <p:sp>
         <p:nvSpPr>
@@ -6346,6 +6374,10 @@
             <a:prstDash val="solid"/>
           </a:ln>
         </p:spPr>
+        <p:txBody>
+          <a:bodyPr/>
+          <a:p/>
+        </p:txBody>
       </p:sp>
       <p:sp>
         <p:nvSpPr>
